--- a/document/ueda.pptx
+++ b/document/ueda.pptx
@@ -8,6 +8,7 @@
     <p:sldId id="256" r:id="rId2"/>
     <p:sldId id="257" r:id="rId3"/>
     <p:sldId id="258" r:id="rId4"/>
+    <p:sldId id="259" r:id="rId5"/>
   </p:sldIdLst>
   <p:sldSz cx="12192000" cy="6858000"/>
   <p:notesSz cx="6858000" cy="9144000"/>
@@ -261,7 +262,7 @@
           <a:p>
             <a:fld id="{EF9193E5-2930-40D6-A58A-398E7BA58F5A}" type="datetimeFigureOut">
               <a:rPr kumimoji="1" lang="ja-JP" altLang="en-US" smtClean="0"/>
-              <a:t>2026/7/10</a:t>
+              <a:t>2026/7/28</a:t>
             </a:fld>
             <a:endParaRPr kumimoji="1" lang="ja-JP" altLang="en-US"/>
           </a:p>
@@ -491,7 +492,7 @@
           <a:p>
             <a:fld id="{EF9193E5-2930-40D6-A58A-398E7BA58F5A}" type="datetimeFigureOut">
               <a:rPr kumimoji="1" lang="ja-JP" altLang="en-US" smtClean="0"/>
-              <a:t>2026/7/10</a:t>
+              <a:t>2026/7/28</a:t>
             </a:fld>
             <a:endParaRPr kumimoji="1" lang="ja-JP" altLang="en-US"/>
           </a:p>
@@ -731,7 +732,7 @@
           <a:p>
             <a:fld id="{EF9193E5-2930-40D6-A58A-398E7BA58F5A}" type="datetimeFigureOut">
               <a:rPr kumimoji="1" lang="ja-JP" altLang="en-US" smtClean="0"/>
-              <a:t>2026/7/10</a:t>
+              <a:t>2026/7/28</a:t>
             </a:fld>
             <a:endParaRPr kumimoji="1" lang="ja-JP" altLang="en-US"/>
           </a:p>
@@ -961,7 +962,7 @@
           <a:p>
             <a:fld id="{EF9193E5-2930-40D6-A58A-398E7BA58F5A}" type="datetimeFigureOut">
               <a:rPr kumimoji="1" lang="ja-JP" altLang="en-US" smtClean="0"/>
-              <a:t>2026/7/10</a:t>
+              <a:t>2026/7/28</a:t>
             </a:fld>
             <a:endParaRPr kumimoji="1" lang="ja-JP" altLang="en-US"/>
           </a:p>
@@ -1236,7 +1237,7 @@
           <a:p>
             <a:fld id="{EF9193E5-2930-40D6-A58A-398E7BA58F5A}" type="datetimeFigureOut">
               <a:rPr kumimoji="1" lang="ja-JP" altLang="en-US" smtClean="0"/>
-              <a:t>2026/7/10</a:t>
+              <a:t>2026/7/28</a:t>
             </a:fld>
             <a:endParaRPr kumimoji="1" lang="ja-JP" altLang="en-US"/>
           </a:p>
@@ -1565,7 +1566,7 @@
           <a:p>
             <a:fld id="{EF9193E5-2930-40D6-A58A-398E7BA58F5A}" type="datetimeFigureOut">
               <a:rPr kumimoji="1" lang="ja-JP" altLang="en-US" smtClean="0"/>
-              <a:t>2026/7/10</a:t>
+              <a:t>2026/7/28</a:t>
             </a:fld>
             <a:endParaRPr kumimoji="1" lang="ja-JP" altLang="en-US"/>
           </a:p>
@@ -2041,7 +2042,7 @@
           <a:p>
             <a:fld id="{EF9193E5-2930-40D6-A58A-398E7BA58F5A}" type="datetimeFigureOut">
               <a:rPr kumimoji="1" lang="ja-JP" altLang="en-US" smtClean="0"/>
-              <a:t>2026/7/10</a:t>
+              <a:t>2026/7/28</a:t>
             </a:fld>
             <a:endParaRPr kumimoji="1" lang="ja-JP" altLang="en-US"/>
           </a:p>
@@ -2182,7 +2183,7 @@
           <a:p>
             <a:fld id="{EF9193E5-2930-40D6-A58A-398E7BA58F5A}" type="datetimeFigureOut">
               <a:rPr kumimoji="1" lang="ja-JP" altLang="en-US" smtClean="0"/>
-              <a:t>2026/7/10</a:t>
+              <a:t>2026/7/28</a:t>
             </a:fld>
             <a:endParaRPr kumimoji="1" lang="ja-JP" altLang="en-US"/>
           </a:p>
@@ -2295,7 +2296,7 @@
           <a:p>
             <a:fld id="{EF9193E5-2930-40D6-A58A-398E7BA58F5A}" type="datetimeFigureOut">
               <a:rPr kumimoji="1" lang="ja-JP" altLang="en-US" smtClean="0"/>
-              <a:t>2026/7/10</a:t>
+              <a:t>2026/7/28</a:t>
             </a:fld>
             <a:endParaRPr kumimoji="1" lang="ja-JP" altLang="en-US"/>
           </a:p>
@@ -2638,7 +2639,7 @@
           <a:p>
             <a:fld id="{EF9193E5-2930-40D6-A58A-398E7BA58F5A}" type="datetimeFigureOut">
               <a:rPr kumimoji="1" lang="ja-JP" altLang="en-US" smtClean="0"/>
-              <a:t>2026/7/10</a:t>
+              <a:t>2026/7/28</a:t>
             </a:fld>
             <a:endParaRPr kumimoji="1" lang="ja-JP" altLang="en-US"/>
           </a:p>
@@ -2926,7 +2927,7 @@
           <a:p>
             <a:fld id="{EF9193E5-2930-40D6-A58A-398E7BA58F5A}" type="datetimeFigureOut">
               <a:rPr kumimoji="1" lang="ja-JP" altLang="en-US" smtClean="0"/>
-              <a:t>2026/7/10</a:t>
+              <a:t>2026/7/28</a:t>
             </a:fld>
             <a:endParaRPr kumimoji="1" lang="ja-JP" altLang="en-US"/>
           </a:p>
@@ -3199,7 +3200,7 @@
           <a:p>
             <a:fld id="{EF9193E5-2930-40D6-A58A-398E7BA58F5A}" type="datetimeFigureOut">
               <a:rPr kumimoji="1" lang="ja-JP" altLang="en-US" smtClean="0"/>
-              <a:t>2026/7/10</a:t>
+              <a:t>2026/7/28</a:t>
             </a:fld>
             <a:endParaRPr kumimoji="1" lang="ja-JP" altLang="en-US"/>
           </a:p>
@@ -4514,6 +4515,201 @@
     <p:extLst>
       <p:ext uri="{BB962C8B-B14F-4D97-AF65-F5344CB8AC3E}">
         <p14:creationId xmlns:p14="http://schemas.microsoft.com/office/powerpoint/2010/main" val="3764751925"/>
+      </p:ext>
+    </p:extLst>
+  </p:cSld>
+  <p:clrMapOvr>
+    <a:masterClrMapping/>
+  </p:clrMapOvr>
+</p:sld>
+</file>
+
+<file path=ppt/slides/slide4.xml><?xml version="1.0" encoding="utf-8"?>
+<p:sld xmlns:a="http://schemas.openxmlformats.org/drawingml/2006/main" xmlns:r="http://schemas.openxmlformats.org/officeDocument/2006/relationships" xmlns:p="http://schemas.openxmlformats.org/presentationml/2006/main">
+  <p:cSld>
+    <p:spTree>
+      <p:nvGrpSpPr>
+        <p:cNvPr id="1" name=""/>
+        <p:cNvGrpSpPr/>
+        <p:nvPr/>
+      </p:nvGrpSpPr>
+      <p:grpSpPr>
+        <a:xfrm>
+          <a:off x="0" y="0"/>
+          <a:ext cx="0" cy="0"/>
+          <a:chOff x="0" y="0"/>
+          <a:chExt cx="0" cy="0"/>
+        </a:xfrm>
+      </p:grpSpPr>
+      <p:sp>
+        <p:nvSpPr>
+          <p:cNvPr id="2" name="正方形/長方形 1">
+            <a:extLst>
+              <a:ext uri="{FF2B5EF4-FFF2-40B4-BE49-F238E27FC236}">
+                <a16:creationId xmlns:a16="http://schemas.microsoft.com/office/drawing/2014/main" id="{BA8D84BD-1E56-CD04-3B6D-0B9AA5DB786E}"/>
+              </a:ext>
+            </a:extLst>
+          </p:cNvPr>
+          <p:cNvSpPr/>
+          <p:nvPr/>
+        </p:nvSpPr>
+        <p:spPr>
+          <a:xfrm>
+            <a:off x="3556000" y="309915"/>
+            <a:ext cx="5080000" cy="6238172"/>
+          </a:xfrm>
+          <a:prstGeom prst="rect">
+            <a:avLst/>
+          </a:prstGeom>
+          <a:noFill/>
+        </p:spPr>
+        <p:style>
+          <a:lnRef idx="2">
+            <a:schemeClr val="accent1">
+              <a:shade val="15000"/>
+            </a:schemeClr>
+          </a:lnRef>
+          <a:fillRef idx="1">
+            <a:schemeClr val="accent1"/>
+          </a:fillRef>
+          <a:effectRef idx="0">
+            <a:schemeClr val="accent1"/>
+          </a:effectRef>
+          <a:fontRef idx="minor">
+            <a:schemeClr val="lt1"/>
+          </a:fontRef>
+        </p:style>
+        <p:txBody>
+          <a:bodyPr rtlCol="0" anchor="ctr"/>
+          <a:lstStyle/>
+          <a:p>
+            <a:pPr algn="ctr"/>
+            <a:endParaRPr kumimoji="1" lang="ja-JP" altLang="en-US"/>
+          </a:p>
+        </p:txBody>
+      </p:sp>
+      <p:sp>
+        <p:nvSpPr>
+          <p:cNvPr id="3" name="正方形/長方形 2">
+            <a:extLst>
+              <a:ext uri="{FF2B5EF4-FFF2-40B4-BE49-F238E27FC236}">
+                <a16:creationId xmlns:a16="http://schemas.microsoft.com/office/drawing/2014/main" id="{79A40081-470E-8A6F-87F2-E63D1BAFDB26}"/>
+              </a:ext>
+            </a:extLst>
+          </p:cNvPr>
+          <p:cNvSpPr/>
+          <p:nvPr/>
+        </p:nvSpPr>
+        <p:spPr>
+          <a:xfrm>
+            <a:off x="3571683" y="288435"/>
+            <a:ext cx="5032269" cy="1288752"/>
+          </a:xfrm>
+          <a:prstGeom prst="rect">
+            <a:avLst/>
+          </a:prstGeom>
+          <a:noFill/>
+        </p:spPr>
+        <p:style>
+          <a:lnRef idx="2">
+            <a:schemeClr val="accent1">
+              <a:shade val="15000"/>
+            </a:schemeClr>
+          </a:lnRef>
+          <a:fillRef idx="1">
+            <a:schemeClr val="accent1"/>
+          </a:fillRef>
+          <a:effectRef idx="0">
+            <a:schemeClr val="accent1"/>
+          </a:effectRef>
+          <a:fontRef idx="minor">
+            <a:schemeClr val="lt1"/>
+          </a:fontRef>
+        </p:style>
+        <p:txBody>
+          <a:bodyPr rtlCol="0" anchor="ctr"/>
+          <a:lstStyle/>
+          <a:p>
+            <a:pPr algn="ctr"/>
+            <a:endParaRPr kumimoji="1" lang="ja-JP" altLang="en-US"/>
+          </a:p>
+        </p:txBody>
+      </p:sp>
+      <p:sp>
+        <p:nvSpPr>
+          <p:cNvPr id="4" name="テキスト ボックス 3">
+            <a:extLst>
+              <a:ext uri="{FF2B5EF4-FFF2-40B4-BE49-F238E27FC236}">
+                <a16:creationId xmlns:a16="http://schemas.microsoft.com/office/drawing/2014/main" id="{9230269E-8C99-CC72-DC91-1283C768FE3D}"/>
+              </a:ext>
+            </a:extLst>
+          </p:cNvPr>
+          <p:cNvSpPr txBox="1"/>
+          <p:nvPr/>
+        </p:nvSpPr>
+        <p:spPr>
+          <a:xfrm>
+            <a:off x="3648701" y="540048"/>
+            <a:ext cx="3365789" cy="369332"/>
+          </a:xfrm>
+          <a:prstGeom prst="rect">
+            <a:avLst/>
+          </a:prstGeom>
+          <a:noFill/>
+        </p:spPr>
+        <p:txBody>
+          <a:bodyPr wrap="square" rtlCol="0">
+            <a:spAutoFit/>
+          </a:bodyPr>
+          <a:lstStyle/>
+          <a:p>
+            <a:r>
+              <a:rPr lang="ja-JP" altLang="en-US" dirty="0"/>
+              <a:t>日田市の紹介について</a:t>
+            </a:r>
+            <a:endParaRPr kumimoji="1" lang="ja-JP" altLang="en-US" dirty="0"/>
+          </a:p>
+        </p:txBody>
+      </p:sp>
+      <p:sp>
+        <p:nvSpPr>
+          <p:cNvPr id="5" name="テキスト ボックス 4">
+            <a:extLst>
+              <a:ext uri="{FF2B5EF4-FFF2-40B4-BE49-F238E27FC236}">
+                <a16:creationId xmlns:a16="http://schemas.microsoft.com/office/drawing/2014/main" id="{35BCE9D4-0C43-5CC1-306A-5F35397827EE}"/>
+              </a:ext>
+            </a:extLst>
+          </p:cNvPr>
+          <p:cNvSpPr txBox="1"/>
+          <p:nvPr/>
+        </p:nvSpPr>
+        <p:spPr>
+          <a:xfrm>
+            <a:off x="3823297" y="1104644"/>
+            <a:ext cx="2712515" cy="369332"/>
+          </a:xfrm>
+          <a:prstGeom prst="rect">
+            <a:avLst/>
+          </a:prstGeom>
+          <a:noFill/>
+        </p:spPr>
+        <p:txBody>
+          <a:bodyPr wrap="square" rtlCol="0">
+            <a:spAutoFit/>
+          </a:bodyPr>
+          <a:lstStyle/>
+          <a:p>
+            <a:r>
+              <a:rPr kumimoji="1" lang="ja-JP" altLang="en-US" dirty="0"/>
+              <a:t>サブテーマ</a:t>
+            </a:r>
+          </a:p>
+        </p:txBody>
+      </p:sp>
+    </p:spTree>
+    <p:extLst>
+      <p:ext uri="{BB962C8B-B14F-4D97-AF65-F5344CB8AC3E}">
+        <p14:creationId xmlns:p14="http://schemas.microsoft.com/office/powerpoint/2010/main" val="3018854614"/>
       </p:ext>
     </p:extLst>
   </p:cSld>
